--- a/3_Presentation/Sentry_Presentation.pptx
+++ b/3_Presentation/Sentry_Presentation.pptx
@@ -929,7 +929,7 @@
           <a:p>
             <a:r>
               <a:rPr lang="en-US" dirty="0"/>
-              <a:t>Introduce Sentry: a static linter that reads three kinds of config files and reports insecure settings. Emphasise 'static' — it never touches a live system.</a:t>
+              <a:t>Introduce Sentry: a static linter that reads three kinds of config files and reports insecure settings. Emphasise 'static': it never touches a live system.</a:t>
             </a:r>
             <a:endParaRPr lang="en-US" dirty="0"/>
           </a:p>
@@ -1017,7 +1017,7 @@
           <a:p>
             <a:r>
               <a:rPr lang="en-US" dirty="0"/>
-              <a:t>Close the content with what we learned — technical and process lessons both.</a:t>
+              <a:t>Close the content with what we learned: technical and process lessons both.</a:t>
             </a:r>
             <a:endParaRPr lang="en-US" dirty="0"/>
           </a:p>
@@ -1193,7 +1193,7 @@
           <a:p>
             <a:r>
               <a:rPr lang="en-US" dirty="0"/>
-              <a:t>Each member states what they personally built — this answers the 'explain what your group implemented' requirement. James is team lead.</a:t>
+              <a:t>Each member states what they personally built. This answers the 'explain what your group implemented' requirement. James is team lead.</a:t>
             </a:r>
             <a:endParaRPr lang="en-US" dirty="0"/>
           </a:p>
@@ -1369,7 +1369,7 @@
           <a:p>
             <a:r>
               <a:rPr lang="en-US" dirty="0"/>
-              <a:t>Left to right: a config file is parsed into normalized directives; the engine applies YAML rules; findings go to a reporter. The engine has no SSH/nginx/Docker knowledge — that lives in the rulesets.</a:t>
+              <a:t>Left to right: a config file is parsed into normalized directives; the engine applies YAML rules; findings go to a reporter. The engine has no SSH/nginx/Docker knowledge; that lives in the rulesets.</a:t>
             </a:r>
             <a:endParaRPr lang="en-US" dirty="0"/>
           </a:p>
@@ -2337,7 +2337,7 @@
                 <a:ea typeface="Calibri" pitchFamily="34" charset="-122"/>
                 <a:cs typeface="Calibri" pitchFamily="34" charset="-120"/>
               </a:rPr>
-              <a:t>Finds insecure settings in sshd, nginx, and docker-compose configs — before they ship.</a:t>
+              <a:t>Finds insecure settings in sshd, nginx, and docker-compose configs, before they ship.</a:t>
             </a:r>
             <a:endParaRPr lang="en-US" sz="1500" dirty="0"/>
           </a:p>
@@ -3177,7 +3177,7 @@
                 <a:ea typeface="Calibri" pitchFamily="34" charset="-122"/>
                 <a:cs typeface="Calibri" pitchFamily="34" charset="-120"/>
               </a:rPr>
-              <a:t>18 unit tests caught real bugs — like a broken secret-detection assertion.</a:t>
+              <a:t>18 unit tests caught real bugs, like a broken secret-detection assertion.</a:t>
             </a:r>
             <a:endParaRPr lang="en-US" sz="1250" dirty="0"/>
           </a:p>
@@ -3906,7 +3906,7 @@
                 <a:ea typeface="Calibri" pitchFamily="34" charset="-122"/>
                 <a:cs typeface="Calibri" pitchFamily="34" charset="-120"/>
               </a:rPr>
-              <a:t>Sentry — static analysis only. It never connects to a live system.</a:t>
+              <a:t>Sentry: static analysis only. It never connects to a live system.</a:t>
             </a:r>
             <a:endParaRPr lang="en-US" sz="1500" dirty="0"/>
           </a:p>
@@ -5296,7 +5296,7 @@
                 <a:ea typeface="Calibri" pitchFamily="34" charset="-122"/>
                 <a:cs typeface="Calibri" pitchFamily="34" charset="-120"/>
               </a:rPr>
-              <a:t>Misconfiguration — not exotic exploits — is one of the most common causes of real breaches.</a:t>
+              <a:t>Misconfiguration, not exotic exploits, is one of the most common causes of real breaches.</a:t>
             </a:r>
             <a:endParaRPr lang="en-US" sz="1600" dirty="0"/>
           </a:p>
@@ -5638,7 +5638,7 @@
                 <a:ea typeface="Calibri" pitchFamily="34" charset="-122"/>
                 <a:cs typeface="Calibri" pitchFamily="34" charset="-120"/>
               </a:rPr>
-              <a:t>Every check lives in YAML — add one without touching code.</a:t>
+              <a:t>Every check lives in YAML; add one without touching code.</a:t>
             </a:r>
             <a:endParaRPr lang="en-US" sz="1250" dirty="0"/>
           </a:p>
@@ -6661,7 +6661,7 @@
                 <a:ea typeface="Calibri" pitchFamily="34" charset="-122"/>
                 <a:cs typeface="Calibri" pitchFamily="34" charset="-120"/>
               </a:rPr>
-              <a:t>That means there is no attack target to set up and no risk of touching a real system — the whole 'tested only in a controlled environment' requirement is satisfied by design.</a:t>
+              <a:t>That means there is no attack target to set up and no risk of touching a real system. The whole 'tested only in a controlled environment' requirement is satisfied by design.</a:t>
             </a:r>
             <a:endParaRPr lang="en-US" sz="1500" dirty="0"/>
           </a:p>
@@ -8407,7 +8407,7 @@
                 <a:ea typeface="Calibri" pitchFamily="34" charset="-122"/>
                 <a:cs typeface="Calibri" pitchFamily="34" charset="-120"/>
               </a:rPr>
-              <a:t> — so every team member can read and explain it.</a:t>
+              <a:t>, so every team member can read and explain it.</a:t>
             </a:r>
             <a:endParaRPr lang="en-US" sz="1350" dirty="0"/>
           </a:p>
@@ -9337,7 +9337,7 @@
                 <a:ea typeface="Calibri" pitchFamily="34" charset="-122"/>
                 <a:cs typeface="Calibri" pitchFamily="34" charset="-120"/>
               </a:rPr>
-              <a:t>~29 rules — mature tools like Checkov have thousands</a:t>
+              <a:t>~29 rules; mature tools like Checkov have thousands</a:t>
             </a:r>
             <a:endParaRPr lang="en-US" sz="1400" dirty="0"/>
           </a:p>
